--- a/material/Python/09_1_반복문_for.pptx
+++ b/material/Python/09_1_반복문_for.pptx
@@ -1,6 +1,6 @@
 
 <file path=ppt/presentation.xml><?xml version="1.0" encoding="utf-8"?>
-<p:presentation xmlns:a="http://schemas.openxmlformats.org/drawingml/2006/main" xmlns:r="http://schemas.openxmlformats.org/officeDocument/2006/relationships" xmlns:p="http://schemas.openxmlformats.org/presentationml/2006/main" saveSubsetFonts="1">
+<p:presentation xmlns:a="http://schemas.openxmlformats.org/drawingml/2006/main" xmlns:r="http://schemas.openxmlformats.org/officeDocument/2006/relationships" xmlns:p="http://schemas.openxmlformats.org/presentationml/2006/main" embedTrueTypeFonts="1" saveSubsetFonts="1">
   <p:sldMasterIdLst>
     <p:sldMasterId id="2147483660" r:id="rId1"/>
   </p:sldMasterIdLst>
@@ -56,6 +56,29 @@
   </p:sldIdLst>
   <p:sldSz cx="12192000" cy="6858000"/>
   <p:notesSz cx="6858000" cy="9144000"/>
+  <p:embeddedFontLst>
+    <p:embeddedFont>
+      <p:font typeface="G마켓 산스 TTF Bold" panose="02000000000000000000" pitchFamily="2" charset="-127"/>
+      <p:bold r:id="rId48"/>
+    </p:embeddedFont>
+    <p:embeddedFont>
+      <p:font typeface="Pretendard Black" panose="02000A03000000020004" pitchFamily="2" charset="-127"/>
+      <p:bold r:id="rId49"/>
+    </p:embeddedFont>
+    <p:embeddedFont>
+      <p:font typeface="Pretendard Light" panose="02000403000000020004" pitchFamily="2" charset="-127"/>
+      <p:regular r:id="rId50"/>
+    </p:embeddedFont>
+    <p:embeddedFont>
+      <p:font typeface="Pretendard Medium" panose="02000603000000020004" pitchFamily="2" charset="-127"/>
+      <p:regular r:id="rId51"/>
+    </p:embeddedFont>
+    <p:embeddedFont>
+      <p:font typeface="메이플스토리" panose="02000300000000000000" pitchFamily="2" charset="-127"/>
+      <p:regular r:id="rId52"/>
+      <p:bold r:id="rId53"/>
+    </p:embeddedFont>
+  </p:embeddedFontLst>
   <p:defaultTextStyle>
     <a:defPPr>
       <a:defRPr lang="ko-KR"/>
@@ -262,7 +285,7 @@
             <a:fld id="{A13A867C-D490-40C2-AB8D-A60FA70A9BF5}" type="datetimeFigureOut">
               <a:rPr lang="ko-KR" altLang="en-US" smtClean="0"/>
               <a:pPr/>
-              <a:t>2025-07-18</a:t>
+              <a:t>2025-08-21</a:t>
             </a:fld>
             <a:endParaRPr lang="ko-KR" altLang="en-US" dirty="0"/>
           </a:p>
@@ -4918,7 +4941,7 @@
           <a:p>
             <a:fld id="{442BEE3F-2E9A-4FD8-8B8A-8619F3E161C0}" type="datetime1">
               <a:rPr lang="ko-KR" altLang="en-US" smtClean="0"/>
-              <a:t>2025-07-18</a:t>
+              <a:t>2025-08-21</a:t>
             </a:fld>
             <a:endParaRPr lang="ko-KR" altLang="en-US"/>
           </a:p>
@@ -5205,7 +5228,7 @@
           <a:p>
             <a:fld id="{0F78D9C4-20C1-4B15-A116-16DC77AD9A1E}" type="datetime1">
               <a:rPr lang="ko-KR" altLang="en-US" smtClean="0"/>
-              <a:t>2025-07-18</a:t>
+              <a:t>2025-08-21</a:t>
             </a:fld>
             <a:endParaRPr lang="ko-KR" altLang="en-US"/>
           </a:p>
@@ -5380,7 +5403,7 @@
           <a:p>
             <a:fld id="{7F5E23C3-0E3D-4E4E-8486-D7FB4C073DC1}" type="datetime1">
               <a:rPr lang="ko-KR" altLang="en-US" smtClean="0"/>
-              <a:t>2025-07-18</a:t>
+              <a:t>2025-08-21</a:t>
             </a:fld>
             <a:endParaRPr lang="ko-KR" altLang="en-US"/>
           </a:p>
@@ -5709,7 +5732,7 @@
           <a:p>
             <a:fld id="{7F5E23C3-0E3D-4E4E-8486-D7FB4C073DC1}" type="datetime1">
               <a:rPr lang="ko-KR" altLang="en-US" smtClean="0"/>
-              <a:t>2025-07-18</a:t>
+              <a:t>2025-08-21</a:t>
             </a:fld>
             <a:endParaRPr lang="ko-KR" altLang="en-US"/>
           </a:p>
@@ -6519,7 +6542,7 @@
           <a:p>
             <a:fld id="{0F78D9C4-20C1-4B15-A116-16DC77AD9A1E}" type="datetime1">
               <a:rPr lang="ko-KR" altLang="en-US" smtClean="0"/>
-              <a:t>2025-07-18</a:t>
+              <a:t>2025-08-21</a:t>
             </a:fld>
             <a:endParaRPr lang="ko-KR" altLang="en-US"/>
           </a:p>
@@ -6930,7 +6953,7 @@
           <a:p>
             <a:fld id="{0F78D9C4-20C1-4B15-A116-16DC77AD9A1E}" type="datetime1">
               <a:rPr lang="ko-KR" altLang="en-US" smtClean="0"/>
-              <a:t>2025-07-18</a:t>
+              <a:t>2025-08-21</a:t>
             </a:fld>
             <a:endParaRPr lang="ko-KR" altLang="en-US"/>
           </a:p>
@@ -7370,7 +7393,7 @@
           <a:p>
             <a:fld id="{0F78D9C4-20C1-4B15-A116-16DC77AD9A1E}" type="datetime1">
               <a:rPr lang="ko-KR" altLang="en-US" smtClean="0"/>
-              <a:t>2025-07-18</a:t>
+              <a:t>2025-08-21</a:t>
             </a:fld>
             <a:endParaRPr lang="ko-KR" altLang="en-US"/>
           </a:p>
@@ -7639,7 +7662,7 @@
           <a:p>
             <a:fld id="{0F78D9C4-20C1-4B15-A116-16DC77AD9A1E}" type="datetime1">
               <a:rPr lang="ko-KR" altLang="en-US" smtClean="0"/>
-              <a:t>2025-07-18</a:t>
+              <a:t>2025-08-21</a:t>
             </a:fld>
             <a:endParaRPr lang="ko-KR" altLang="en-US"/>
           </a:p>
@@ -7955,7 +7978,7 @@
           <a:p>
             <a:fld id="{0F78D9C4-20C1-4B15-A116-16DC77AD9A1E}" type="datetime1">
               <a:rPr lang="ko-KR" altLang="en-US" smtClean="0"/>
-              <a:t>2025-07-18</a:t>
+              <a:t>2025-08-21</a:t>
             </a:fld>
             <a:endParaRPr lang="ko-KR" altLang="en-US"/>
           </a:p>
@@ -8250,7 +8273,7 @@
           <a:p>
             <a:fld id="{0F78D9C4-20C1-4B15-A116-16DC77AD9A1E}" type="datetime1">
               <a:rPr lang="ko-KR" altLang="en-US" smtClean="0"/>
-              <a:t>2025-07-18</a:t>
+              <a:t>2025-08-21</a:t>
             </a:fld>
             <a:endParaRPr lang="ko-KR" altLang="en-US"/>
           </a:p>
@@ -8490,7 +8513,7 @@
           <a:p>
             <a:fld id="{0F78D9C4-20C1-4B15-A116-16DC77AD9A1E}" type="datetime1">
               <a:rPr lang="ko-KR" altLang="en-US" smtClean="0"/>
-              <a:t>2025-07-18</a:t>
+              <a:t>2025-08-21</a:t>
             </a:fld>
             <a:endParaRPr lang="ko-KR" altLang="en-US"/>
           </a:p>
@@ -9010,7 +9033,7 @@
           <a:p>
             <a:fld id="{76022175-F16A-4A96-8E45-178BE9345AE9}" type="datetime6">
               <a:rPr lang="ko-KR" altLang="en-US" smtClean="0"/>
-              <a:t>2025년 7월</a:t>
+              <a:t>2025년 8월</a:t>
             </a:fld>
             <a:endParaRPr lang="ko-KR" altLang="en-US"/>
           </a:p>
@@ -9525,7 +9548,7 @@
           <a:p>
             <a:fld id="{76022175-F16A-4A96-8E45-178BE9345AE9}" type="datetime6">
               <a:rPr lang="ko-KR" altLang="en-US" smtClean="0"/>
-              <a:t>2025년 7월</a:t>
+              <a:t>2025년 8월</a:t>
             </a:fld>
             <a:endParaRPr lang="ko-KR" altLang="en-US"/>
           </a:p>
@@ -9730,7 +9753,7 @@
           <a:p>
             <a:fld id="{0F78D9C4-20C1-4B15-A116-16DC77AD9A1E}" type="datetime1">
               <a:rPr lang="ko-KR" altLang="en-US" smtClean="0"/>
-              <a:t>2025-07-18</a:t>
+              <a:t>2025-08-21</a:t>
             </a:fld>
             <a:endParaRPr lang="ko-KR" altLang="en-US"/>
           </a:p>
@@ -10458,7 +10481,7 @@
           <a:p>
             <a:fld id="{0F78D9C4-20C1-4B15-A116-16DC77AD9A1E}" type="datetime1">
               <a:rPr lang="ko-KR" altLang="en-US" smtClean="0"/>
-              <a:t>2025-07-18</a:t>
+              <a:t>2025-08-21</a:t>
             </a:fld>
             <a:endParaRPr lang="ko-KR" altLang="en-US"/>
           </a:p>
@@ -10767,7 +10790,7 @@
           <a:p>
             <a:fld id="{0F78D9C4-20C1-4B15-A116-16DC77AD9A1E}" type="datetime1">
               <a:rPr lang="ko-KR" altLang="en-US" smtClean="0"/>
-              <a:t>2025-07-18</a:t>
+              <a:t>2025-08-21</a:t>
             </a:fld>
             <a:endParaRPr lang="ko-KR" altLang="en-US"/>
           </a:p>
@@ -11017,7 +11040,7 @@
           <a:p>
             <a:fld id="{0F78D9C4-20C1-4B15-A116-16DC77AD9A1E}" type="datetime1">
               <a:rPr lang="ko-KR" altLang="en-US" smtClean="0"/>
-              <a:t>2025-07-18</a:t>
+              <a:t>2025-08-21</a:t>
             </a:fld>
             <a:endParaRPr lang="ko-KR" altLang="en-US"/>
           </a:p>
@@ -11318,7 +11341,7 @@
           <a:p>
             <a:fld id="{0F78D9C4-20C1-4B15-A116-16DC77AD9A1E}" type="datetime1">
               <a:rPr lang="ko-KR" altLang="en-US" smtClean="0"/>
-              <a:t>2025-07-18</a:t>
+              <a:t>2025-08-21</a:t>
             </a:fld>
             <a:endParaRPr lang="ko-KR" altLang="en-US"/>
           </a:p>
@@ -11767,7 +11790,7 @@
           <a:p>
             <a:fld id="{76022175-F16A-4A96-8E45-178BE9345AE9}" type="datetime6">
               <a:rPr lang="ko-KR" altLang="en-US" smtClean="0"/>
-              <a:t>2025년 7월</a:t>
+              <a:t>2025년 8월</a:t>
             </a:fld>
             <a:endParaRPr lang="ko-KR" altLang="en-US"/>
           </a:p>
@@ -12332,7 +12355,7 @@
           <a:p>
             <a:fld id="{76022175-F16A-4A96-8E45-178BE9345AE9}" type="datetime6">
               <a:rPr lang="ko-KR" altLang="en-US" smtClean="0"/>
-              <a:t>2025년 7월</a:t>
+              <a:t>2025년 8월</a:t>
             </a:fld>
             <a:endParaRPr lang="ko-KR" altLang="en-US"/>
           </a:p>
@@ -12699,7 +12722,7 @@
           <a:p>
             <a:fld id="{0F78D9C4-20C1-4B15-A116-16DC77AD9A1E}" type="datetime1">
               <a:rPr lang="ko-KR" altLang="en-US" smtClean="0"/>
-              <a:t>2025-07-18</a:t>
+              <a:t>2025-08-21</a:t>
             </a:fld>
             <a:endParaRPr lang="ko-KR" altLang="en-US"/>
           </a:p>
@@ -13067,7 +13090,7 @@
           <a:p>
             <a:fld id="{0F78D9C4-20C1-4B15-A116-16DC77AD9A1E}" type="datetime1">
               <a:rPr lang="ko-KR" altLang="en-US" smtClean="0"/>
-              <a:t>2025-07-18</a:t>
+              <a:t>2025-08-21</a:t>
             </a:fld>
             <a:endParaRPr lang="ko-KR" altLang="en-US"/>
           </a:p>
@@ -13443,7 +13466,7 @@
           <a:p>
             <a:fld id="{0F78D9C4-20C1-4B15-A116-16DC77AD9A1E}" type="datetime1">
               <a:rPr lang="ko-KR" altLang="en-US" smtClean="0"/>
-              <a:t>2025-07-18</a:t>
+              <a:t>2025-08-21</a:t>
             </a:fld>
             <a:endParaRPr lang="ko-KR" altLang="en-US"/>
           </a:p>
@@ -13881,7 +13904,7 @@
           <a:p>
             <a:fld id="{0F78D9C4-20C1-4B15-A116-16DC77AD9A1E}" type="datetime1">
               <a:rPr lang="ko-KR" altLang="en-US" smtClean="0"/>
-              <a:t>2025-07-18</a:t>
+              <a:t>2025-08-21</a:t>
             </a:fld>
             <a:endParaRPr lang="ko-KR" altLang="en-US"/>
           </a:p>
@@ -14283,7 +14306,7 @@
           <a:p>
             <a:fld id="{0F78D9C4-20C1-4B15-A116-16DC77AD9A1E}" type="datetime1">
               <a:rPr lang="ko-KR" altLang="en-US" smtClean="0"/>
-              <a:t>2025-07-18</a:t>
+              <a:t>2025-08-21</a:t>
             </a:fld>
             <a:endParaRPr lang="ko-KR" altLang="en-US" dirty="0"/>
           </a:p>
@@ -14788,7 +14811,7 @@
           <a:p>
             <a:fld id="{0F78D9C4-20C1-4B15-A116-16DC77AD9A1E}" type="datetime1">
               <a:rPr lang="ko-KR" altLang="en-US" smtClean="0"/>
-              <a:t>2025-07-18</a:t>
+              <a:t>2025-08-21</a:t>
             </a:fld>
             <a:endParaRPr lang="ko-KR" altLang="en-US" dirty="0"/>
           </a:p>
@@ -15237,7 +15260,7 @@
           <a:p>
             <a:fld id="{76022175-F16A-4A96-8E45-178BE9345AE9}" type="datetime6">
               <a:rPr lang="ko-KR" altLang="en-US" smtClean="0"/>
-              <a:t>2025년 7월</a:t>
+              <a:t>2025년 8월</a:t>
             </a:fld>
             <a:endParaRPr lang="ko-KR" altLang="en-US"/>
           </a:p>
@@ -15877,7 +15900,7 @@
           <a:p>
             <a:fld id="{76022175-F16A-4A96-8E45-178BE9345AE9}" type="datetime6">
               <a:rPr lang="ko-KR" altLang="en-US" smtClean="0"/>
-              <a:t>2025년 7월</a:t>
+              <a:t>2025년 8월</a:t>
             </a:fld>
             <a:endParaRPr lang="ko-KR" altLang="en-US"/>
           </a:p>
@@ -16386,7 +16409,7 @@
           <a:p>
             <a:fld id="{0F78D9C4-20C1-4B15-A116-16DC77AD9A1E}" type="datetime1">
               <a:rPr lang="ko-KR" altLang="en-US" smtClean="0"/>
-              <a:t>2025-07-18</a:t>
+              <a:t>2025-08-21</a:t>
             </a:fld>
             <a:endParaRPr lang="ko-KR" altLang="en-US"/>
           </a:p>
@@ -16854,7 +16877,7 @@
           <a:p>
             <a:fld id="{0F78D9C4-20C1-4B15-A116-16DC77AD9A1E}" type="datetime1">
               <a:rPr lang="ko-KR" altLang="en-US" smtClean="0"/>
-              <a:t>2025-07-18</a:t>
+              <a:t>2025-08-21</a:t>
             </a:fld>
             <a:endParaRPr lang="ko-KR" altLang="en-US"/>
           </a:p>
@@ -17152,7 +17175,7 @@
           <a:p>
             <a:fld id="{0F78D9C4-20C1-4B15-A116-16DC77AD9A1E}" type="datetime1">
               <a:rPr lang="ko-KR" altLang="en-US" smtClean="0"/>
-              <a:t>2025-07-18</a:t>
+              <a:t>2025-08-21</a:t>
             </a:fld>
             <a:endParaRPr lang="ko-KR" altLang="en-US"/>
           </a:p>
@@ -17382,7 +17405,7 @@
           <a:p>
             <a:fld id="{0F78D9C4-20C1-4B15-A116-16DC77AD9A1E}" type="datetime1">
               <a:rPr lang="ko-KR" altLang="en-US" smtClean="0"/>
-              <a:t>2025-07-18</a:t>
+              <a:t>2025-08-21</a:t>
             </a:fld>
             <a:endParaRPr lang="ko-KR" altLang="en-US" dirty="0"/>
           </a:p>
@@ -17883,7 +17906,7 @@
           <a:p>
             <a:fld id="{0F78D9C4-20C1-4B15-A116-16DC77AD9A1E}" type="datetime1">
               <a:rPr lang="ko-KR" altLang="en-US" smtClean="0"/>
-              <a:t>2025-07-18</a:t>
+              <a:t>2025-08-21</a:t>
             </a:fld>
             <a:endParaRPr lang="ko-KR" altLang="en-US"/>
           </a:p>
@@ -18300,7 +18323,7 @@
           <a:p>
             <a:fld id="{0F78D9C4-20C1-4B15-A116-16DC77AD9A1E}" type="datetime1">
               <a:rPr lang="ko-KR" altLang="en-US" smtClean="0"/>
-              <a:t>2025-07-18</a:t>
+              <a:t>2025-08-21</a:t>
             </a:fld>
             <a:endParaRPr lang="ko-KR" altLang="en-US"/>
           </a:p>
@@ -18896,7 +18919,7 @@
           <a:p>
             <a:fld id="{0F78D9C4-20C1-4B15-A116-16DC77AD9A1E}" type="datetime1">
               <a:rPr lang="ko-KR" altLang="en-US" smtClean="0"/>
-              <a:t>2025-07-18</a:t>
+              <a:t>2025-08-21</a:t>
             </a:fld>
             <a:endParaRPr lang="ko-KR" altLang="en-US"/>
           </a:p>
@@ -19192,7 +19215,7 @@
           <a:p>
             <a:fld id="{0F78D9C4-20C1-4B15-A116-16DC77AD9A1E}" type="datetime1">
               <a:rPr lang="ko-KR" altLang="en-US" smtClean="0"/>
-              <a:t>2025-07-18</a:t>
+              <a:t>2025-08-21</a:t>
             </a:fld>
             <a:endParaRPr lang="ko-KR" altLang="en-US"/>
           </a:p>
@@ -20818,7 +20841,7 @@
           <a:p>
             <a:fld id="{76022175-F16A-4A96-8E45-178BE9345AE9}" type="datetime6">
               <a:rPr lang="ko-KR" altLang="en-US" smtClean="0"/>
-              <a:t>2025년 7월</a:t>
+              <a:t>2025년 8월</a:t>
             </a:fld>
             <a:endParaRPr lang="ko-KR" altLang="en-US"/>
           </a:p>
@@ -21126,7 +21149,7 @@
           <a:p>
             <a:fld id="{0F78D9C4-20C1-4B15-A116-16DC77AD9A1E}" type="datetime1">
               <a:rPr lang="ko-KR" altLang="en-US" smtClean="0"/>
-              <a:t>2025-07-18</a:t>
+              <a:t>2025-08-21</a:t>
             </a:fld>
             <a:endParaRPr lang="ko-KR" altLang="en-US" dirty="0"/>
           </a:p>
@@ -21340,7 +21363,7 @@
           <a:p>
             <a:fld id="{0F78D9C4-20C1-4B15-A116-16DC77AD9A1E}" type="datetime1">
               <a:rPr lang="ko-KR" altLang="en-US" smtClean="0"/>
-              <a:t>2025-07-18</a:t>
+              <a:t>2025-08-21</a:t>
             </a:fld>
             <a:endParaRPr lang="ko-KR" altLang="en-US" dirty="0"/>
           </a:p>
@@ -21545,7 +21568,7 @@
           <a:p>
             <a:fld id="{0F78D9C4-20C1-4B15-A116-16DC77AD9A1E}" type="datetime1">
               <a:rPr lang="ko-KR" altLang="en-US" smtClean="0"/>
-              <a:t>2025-07-18</a:t>
+              <a:t>2025-08-21</a:t>
             </a:fld>
             <a:endParaRPr lang="ko-KR" altLang="en-US" dirty="0"/>
           </a:p>
@@ -22173,7 +22196,7 @@
           <a:p>
             <a:fld id="{0F78D9C4-20C1-4B15-A116-16DC77AD9A1E}" type="datetime1">
               <a:rPr lang="ko-KR" altLang="en-US" smtClean="0"/>
-              <a:t>2025-07-18</a:t>
+              <a:t>2025-08-21</a:t>
             </a:fld>
             <a:endParaRPr lang="ko-KR" altLang="en-US"/>
           </a:p>
